--- a/Clase 2 - EPH e Intro a Tidyverse/Presentación EPH.pptx
+++ b/Clase 2 - EPH e Intro a Tidyverse/Presentación EPH.pptx
@@ -5,7 +5,7 @@
     <p:sldMasterId id="2147483696" r:id="rId4"/>
   </p:sldMasterIdLst>
   <p:notesMasterIdLst>
-    <p:notesMasterId r:id="rId24"/>
+    <p:notesMasterId r:id="rId28"/>
   </p:notesMasterIdLst>
   <p:sldIdLst>
     <p:sldId id="459" r:id="rId5"/>
@@ -27,6 +27,10 @@
     <p:sldId id="353" r:id="rId21"/>
     <p:sldId id="281" r:id="rId22"/>
     <p:sldId id="371" r:id="rId23"/>
+    <p:sldId id="481" r:id="rId24"/>
+    <p:sldId id="484" r:id="rId25"/>
+    <p:sldId id="482" r:id="rId26"/>
+    <p:sldId id="483" r:id="rId27"/>
   </p:sldIdLst>
   <p:sldSz cx="12192000" cy="6858000"/>
   <p:notesSz cx="6858000" cy="9144000"/>
@@ -215,7 +219,7 @@
           <a:p>
             <a:fld id="{30269C05-07A3-4C0B-B452-D73BEED39343}" type="datetimeFigureOut">
               <a:rPr lang="es-ES" smtClean="0"/>
-              <a:t>05/11/2024</a:t>
+              <a:t>30/04/2026</a:t>
             </a:fld>
             <a:endParaRPr lang="es-ES"/>
           </a:p>
@@ -536,6 +540,13 @@
             <a:schemeClr val="lt1"/>
           </a:fontRef>
         </p:style>
+        <p:txBody>
+          <a:bodyPr/>
+          <a:lstStyle/>
+          <a:p>
+            <a:endParaRPr lang="es-AR"/>
+          </a:p>
+        </p:txBody>
       </p:sp>
       <p:sp>
         <p:nvSpPr>
@@ -574,6 +585,13 @@
             <a:schemeClr val="lt1"/>
           </a:fontRef>
         </p:style>
+        <p:txBody>
+          <a:bodyPr/>
+          <a:lstStyle/>
+          <a:p>
+            <a:endParaRPr lang="es-AR"/>
+          </a:p>
+        </p:txBody>
       </p:sp>
       <p:sp>
         <p:nvSpPr>
@@ -708,7 +726,7 @@
           <a:p>
             <a:fld id="{1B3EF8C8-B97B-4B8B-89DD-60B674DEC85F}" type="datetime4">
               <a:rPr lang="es-ES" smtClean="0"/>
-              <a:t>5 de noviembre de 2024</a:t>
+              <a:t>30 de abril de 2026</a:t>
             </a:fld>
             <a:endParaRPr lang="en-US"/>
           </a:p>
@@ -917,7 +935,7 @@
           <a:p>
             <a:fld id="{1B3EF8C8-B97B-4B8B-89DD-60B674DEC85F}" type="datetime4">
               <a:rPr lang="es-ES" smtClean="0"/>
-              <a:t>5 de noviembre de 2024</a:t>
+              <a:t>30 de abril de 2026</a:t>
             </a:fld>
             <a:endParaRPr lang="en-US"/>
           </a:p>
@@ -1174,7 +1192,7 @@
           <a:p>
             <a:fld id="{1B3EF8C8-B97B-4B8B-89DD-60B674DEC85F}" type="datetime4">
               <a:rPr lang="es-ES" smtClean="0"/>
-              <a:t>5 de noviembre de 2024</a:t>
+              <a:t>30 de abril de 2026</a:t>
             </a:fld>
             <a:endParaRPr lang="en-US"/>
           </a:p>
@@ -1349,7 +1367,7 @@
           <a:p>
             <a:fld id="{1B3EF8C8-B97B-4B8B-89DD-60B674DEC85F}" type="datetime4">
               <a:rPr lang="es-ES" smtClean="0"/>
-              <a:t>5 de noviembre de 2024</a:t>
+              <a:t>30 de abril de 2026</a:t>
             </a:fld>
             <a:endParaRPr lang="en-US"/>
           </a:p>
@@ -1693,7 +1711,7 @@
           <a:p>
             <a:fld id="{1B3EF8C8-B97B-4B8B-89DD-60B674DEC85F}" type="datetime4">
               <a:rPr lang="es-ES" smtClean="0"/>
-              <a:t>5 de noviembre de 2024</a:t>
+              <a:t>30 de abril de 2026</a:t>
             </a:fld>
             <a:endParaRPr lang="en-US"/>
           </a:p>
@@ -1969,7 +1987,7 @@
           <a:p>
             <a:fld id="{1B3EF8C8-B97B-4B8B-89DD-60B674DEC85F}" type="datetime4">
               <a:rPr lang="es-ES" smtClean="0"/>
-              <a:t>5 de noviembre de 2024</a:t>
+              <a:t>30 de abril de 2026</a:t>
             </a:fld>
             <a:endParaRPr lang="en-US"/>
           </a:p>
@@ -2349,7 +2367,7 @@
           <a:p>
             <a:fld id="{1B3EF8C8-B97B-4B8B-89DD-60B674DEC85F}" type="datetime4">
               <a:rPr lang="es-ES" smtClean="0"/>
-              <a:t>5 de noviembre de 2024</a:t>
+              <a:t>30 de abril de 2026</a:t>
             </a:fld>
             <a:endParaRPr lang="en-US"/>
           </a:p>
@@ -2468,7 +2486,7 @@
           <a:p>
             <a:fld id="{1B3EF8C8-B97B-4B8B-89DD-60B674DEC85F}" type="datetime4">
               <a:rPr lang="es-ES" smtClean="0"/>
-              <a:t>5 de noviembre de 2024</a:t>
+              <a:t>30 de abril de 2026</a:t>
             </a:fld>
             <a:endParaRPr lang="en-US"/>
           </a:p>
@@ -2640,7 +2658,7 @@
           <a:p>
             <a:fld id="{1B3EF8C8-B97B-4B8B-89DD-60B674DEC85F}" type="datetime4">
               <a:rPr lang="es-ES" smtClean="0"/>
-              <a:t>5 de noviembre de 2024</a:t>
+              <a:t>30 de abril de 2026</a:t>
             </a:fld>
             <a:endParaRPr lang="en-US"/>
           </a:p>
@@ -2995,7 +3013,7 @@
           <a:p>
             <a:fld id="{1B3EF8C8-B97B-4B8B-89DD-60B674DEC85F}" type="datetime4">
               <a:rPr lang="es-ES" smtClean="0"/>
-              <a:t>5 de noviembre de 2024</a:t>
+              <a:t>30 de abril de 2026</a:t>
             </a:fld>
             <a:endParaRPr lang="en-US"/>
           </a:p>
@@ -3378,7 +3396,7 @@
           <a:p>
             <a:fld id="{1B3EF8C8-B97B-4B8B-89DD-60B674DEC85F}" type="datetime4">
               <a:rPr lang="es-ES" smtClean="0"/>
-              <a:t>5 de noviembre de 2024</a:t>
+              <a:t>30 de abril de 2026</a:t>
             </a:fld>
             <a:endParaRPr lang="en-US"/>
           </a:p>
@@ -3499,6 +3517,13 @@
             <a:schemeClr val="lt1"/>
           </a:fontRef>
         </p:style>
+        <p:txBody>
+          <a:bodyPr/>
+          <a:lstStyle/>
+          <a:p>
+            <a:endParaRPr lang="es-AR"/>
+          </a:p>
+        </p:txBody>
       </p:sp>
       <p:sp>
         <p:nvSpPr>
@@ -3537,6 +3562,13 @@
             <a:schemeClr val="lt1"/>
           </a:fontRef>
         </p:style>
+        <p:txBody>
+          <a:bodyPr/>
+          <a:lstStyle/>
+          <a:p>
+            <a:endParaRPr lang="es-AR"/>
+          </a:p>
+        </p:txBody>
       </p:sp>
       <p:sp>
         <p:nvSpPr>
@@ -3666,7 +3698,7 @@
           <a:p>
             <a:fld id="{1B3EF8C8-B97B-4B8B-89DD-60B674DEC85F}" type="datetime4">
               <a:rPr lang="es-ES" smtClean="0"/>
-              <a:t>5 de noviembre de 2024</a:t>
+              <a:t>30 de abril de 2026</a:t>
             </a:fld>
             <a:endParaRPr lang="en-US"/>
           </a:p>
@@ -4220,40 +4252,21 @@
               </a:lnSpc>
             </a:pPr>
             <a:r>
+              <a:rPr lang="es-ES" sz="2800" b="1" dirty="0">
+                <a:latin typeface="Garamond" panose="02020404030301010803" pitchFamily="18" charset="0"/>
+                <a:ea typeface="Times New Roman" panose="02020603050405020304" pitchFamily="18" charset="0"/>
+                <a:cs typeface="Arial" panose="020B0604020202020204" pitchFamily="34" charset="0"/>
+              </a:rPr>
+              <a:t>Programación y visualización en estadísticas laborales 2026 - ASET</a:t>
+            </a:r>
+            <a:r>
               <a:rPr lang="es-MX" sz="2800" b="1" dirty="0">
                 <a:effectLst/>
                 <a:latin typeface="Garamond" panose="02020404030301010803" pitchFamily="18" charset="0"/>
                 <a:ea typeface="Times New Roman" panose="02020603050405020304" pitchFamily="18" charset="0"/>
                 <a:cs typeface="Arial" panose="020B0604020202020204" pitchFamily="34" charset="0"/>
               </a:rPr>
-              <a:t>Herramientas de programación para la producción y difusión de estadísticas socioeconómicas. </a:t>
-            </a:r>
-            <a:r>
-              <a:rPr lang="es-MX" sz="2800" dirty="0">
-                <a:effectLst/>
-                <a:latin typeface="Garamond" panose="02020404030301010803" pitchFamily="18" charset="0"/>
-                <a:ea typeface="Times New Roman" panose="02020603050405020304" pitchFamily="18" charset="0"/>
-                <a:cs typeface="Arial" panose="020B0604020202020204" pitchFamily="34" charset="0"/>
-              </a:rPr>
-              <a:t>Procesamiento con Software “R” y armado de tableros con PowerBI y </a:t>
-            </a:r>
-            <a:r>
-              <a:rPr lang="es-MX" sz="2800" dirty="0" err="1">
-                <a:effectLst/>
-                <a:latin typeface="Garamond" panose="02020404030301010803" pitchFamily="18" charset="0"/>
-                <a:ea typeface="Times New Roman" panose="02020603050405020304" pitchFamily="18" charset="0"/>
-                <a:cs typeface="Arial" panose="020B0604020202020204" pitchFamily="34" charset="0"/>
-              </a:rPr>
-              <a:t>Looker</a:t>
-            </a:r>
-            <a:r>
-              <a:rPr lang="es-MX" sz="2800" dirty="0">
-                <a:effectLst/>
-                <a:latin typeface="Garamond" panose="02020404030301010803" pitchFamily="18" charset="0"/>
-                <a:ea typeface="Times New Roman" panose="02020603050405020304" pitchFamily="18" charset="0"/>
-                <a:cs typeface="Arial" panose="020B0604020202020204" pitchFamily="34" charset="0"/>
-              </a:rPr>
-              <a:t> Studio</a:t>
+              <a:t>. </a:t>
             </a:r>
             <a:endParaRPr lang="es-AR" sz="2800" dirty="0">
               <a:effectLst/>
@@ -7342,7 +7355,7 @@
                           </a:solidFill>
                           <a:latin typeface="Cambria Math" panose="02040503050406030204" pitchFamily="18" charset="0"/>
                         </a:rPr>
-                        <m:t>𝑎𝑐𝑡𝑖𝑣𝑖𝑑</m:t>
+                        <m:t>𝑎𝑐𝑡𝑖𝑣𝑖𝑑𝑎</m:t>
                       </m:r>
                       <m:r>
                         <a:rPr lang="es-AR" i="1">
@@ -7351,7 +7364,7 @@
                           </a:solidFill>
                           <a:latin typeface="Cambria Math" panose="02040503050406030204" pitchFamily="18" charset="0"/>
                         </a:rPr>
-                        <m:t>𝑎𝑑</m:t>
+                        <m:t>𝑑</m:t>
                       </m:r>
                       <m:r>
                         <a:rPr lang="es-AR" i="1">
@@ -10119,6 +10132,412 @@
 </p:sld>
 </file>
 
+<file path=ppt/slides/slide20.xml><?xml version="1.0" encoding="utf-8"?>
+<p:sld xmlns:a="http://schemas.openxmlformats.org/drawingml/2006/main" xmlns:r="http://schemas.openxmlformats.org/officeDocument/2006/relationships" xmlns:p="http://schemas.openxmlformats.org/presentationml/2006/main">
+  <p:cSld>
+    <p:spTree>
+      <p:nvGrpSpPr>
+        <p:cNvPr id="1" name="">
+          <a:extLst>
+            <a:ext uri="{FF2B5EF4-FFF2-40B4-BE49-F238E27FC236}">
+              <a16:creationId xmlns:a16="http://schemas.microsoft.com/office/drawing/2014/main" id="{B222ADE4-F48C-E63C-1102-B06D1EBE467C}"/>
+            </a:ext>
+          </a:extLst>
+        </p:cNvPr>
+        <p:cNvGrpSpPr/>
+        <p:nvPr/>
+      </p:nvGrpSpPr>
+      <p:grpSpPr>
+        <a:xfrm>
+          <a:off x="0" y="0"/>
+          <a:ext cx="0" cy="0"/>
+          <a:chOff x="0" y="0"/>
+          <a:chExt cx="0" cy="0"/>
+        </a:xfrm>
+      </p:grpSpPr>
+      <p:sp>
+        <p:nvSpPr>
+          <p:cNvPr id="2" name="Título 1">
+            <a:extLst>
+              <a:ext uri="{FF2B5EF4-FFF2-40B4-BE49-F238E27FC236}">
+                <a16:creationId xmlns:a16="http://schemas.microsoft.com/office/drawing/2014/main" id="{B68B2224-C6C1-5D27-10AC-A2CC83D362F2}"/>
+              </a:ext>
+            </a:extLst>
+          </p:cNvPr>
+          <p:cNvSpPr>
+            <a:spLocks noGrp="1"/>
+          </p:cNvSpPr>
+          <p:nvPr>
+            <p:ph type="title"/>
+          </p:nvPr>
+        </p:nvSpPr>
+        <p:spPr>
+          <a:xfrm>
+            <a:off x="1724000" y="-10254"/>
+            <a:ext cx="7620000" cy="1143000"/>
+          </a:xfrm>
+        </p:spPr>
+        <p:txBody>
+          <a:bodyPr/>
+          <a:lstStyle/>
+          <a:p>
+            <a:r>
+              <a:rPr lang="es-ES" sz="4000" dirty="0"/>
+              <a:t>Distinción según formalidad (empleo y sector)</a:t>
+            </a:r>
+            <a:endParaRPr lang="es-AR" sz="4000" dirty="0"/>
+          </a:p>
+        </p:txBody>
+      </p:sp>
+      <p:pic>
+        <p:nvPicPr>
+          <p:cNvPr id="11" name="Imagen 10">
+            <a:extLst>
+              <a:ext uri="{FF2B5EF4-FFF2-40B4-BE49-F238E27FC236}">
+                <a16:creationId xmlns:a16="http://schemas.microsoft.com/office/drawing/2014/main" id="{054E950D-7963-E3EE-943D-2EABECDC474D}"/>
+              </a:ext>
+            </a:extLst>
+          </p:cNvPr>
+          <p:cNvPicPr>
+            <a:picLocks noChangeAspect="1"/>
+          </p:cNvPicPr>
+          <p:nvPr/>
+        </p:nvPicPr>
+        <p:blipFill>
+          <a:blip r:embed="rId2"/>
+          <a:stretch>
+            <a:fillRect/>
+          </a:stretch>
+        </p:blipFill>
+        <p:spPr>
+          <a:xfrm>
+            <a:off x="1724000" y="1268761"/>
+            <a:ext cx="7620000" cy="5441509"/>
+          </a:xfrm>
+          <a:prstGeom prst="rect">
+            <a:avLst/>
+          </a:prstGeom>
+        </p:spPr>
+      </p:pic>
+    </p:spTree>
+    <p:extLst>
+      <p:ext uri="{BB962C8B-B14F-4D97-AF65-F5344CB8AC3E}">
+        <p14:creationId xmlns:p14="http://schemas.microsoft.com/office/powerpoint/2010/main" val="367111989"/>
+      </p:ext>
+    </p:extLst>
+  </p:cSld>
+  <p:clrMapOvr>
+    <a:masterClrMapping/>
+  </p:clrMapOvr>
+</p:sld>
+</file>
+
+<file path=ppt/slides/slide21.xml><?xml version="1.0" encoding="utf-8"?>
+<p:sld xmlns:a="http://schemas.openxmlformats.org/drawingml/2006/main" xmlns:r="http://schemas.openxmlformats.org/officeDocument/2006/relationships" xmlns:p="http://schemas.openxmlformats.org/presentationml/2006/main">
+  <p:cSld>
+    <p:spTree>
+      <p:nvGrpSpPr>
+        <p:cNvPr id="1" name="">
+          <a:extLst>
+            <a:ext uri="{FF2B5EF4-FFF2-40B4-BE49-F238E27FC236}">
+              <a16:creationId xmlns:a16="http://schemas.microsoft.com/office/drawing/2014/main" id="{8739AB82-1FA2-B010-00D6-52DE6163DEDD}"/>
+            </a:ext>
+          </a:extLst>
+        </p:cNvPr>
+        <p:cNvGrpSpPr/>
+        <p:nvPr/>
+      </p:nvGrpSpPr>
+      <p:grpSpPr>
+        <a:xfrm>
+          <a:off x="0" y="0"/>
+          <a:ext cx="0" cy="0"/>
+          <a:chOff x="0" y="0"/>
+          <a:chExt cx="0" cy="0"/>
+        </a:xfrm>
+      </p:grpSpPr>
+      <p:pic>
+        <p:nvPicPr>
+          <p:cNvPr id="3" name="Imagen 2">
+            <a:extLst>
+              <a:ext uri="{FF2B5EF4-FFF2-40B4-BE49-F238E27FC236}">
+                <a16:creationId xmlns:a16="http://schemas.microsoft.com/office/drawing/2014/main" id="{6D39F816-761E-2922-0340-382D2C4523FC}"/>
+              </a:ext>
+            </a:extLst>
+          </p:cNvPr>
+          <p:cNvPicPr>
+            <a:picLocks noChangeAspect="1"/>
+          </p:cNvPicPr>
+          <p:nvPr/>
+        </p:nvPicPr>
+        <p:blipFill>
+          <a:blip r:embed="rId2"/>
+          <a:stretch>
+            <a:fillRect/>
+          </a:stretch>
+        </p:blipFill>
+        <p:spPr>
+          <a:xfrm>
+            <a:off x="2567608" y="272063"/>
+            <a:ext cx="6332018" cy="6313875"/>
+          </a:xfrm>
+          <a:prstGeom prst="rect">
+            <a:avLst/>
+          </a:prstGeom>
+        </p:spPr>
+      </p:pic>
+      <p:sp>
+        <p:nvSpPr>
+          <p:cNvPr id="4" name="CuadroTexto 3">
+            <a:extLst>
+              <a:ext uri="{FF2B5EF4-FFF2-40B4-BE49-F238E27FC236}">
+                <a16:creationId xmlns:a16="http://schemas.microsoft.com/office/drawing/2014/main" id="{E00E585F-5F25-29A3-5FD1-7F8C75DDA795}"/>
+              </a:ext>
+            </a:extLst>
+          </p:cNvPr>
+          <p:cNvSpPr txBox="1"/>
+          <p:nvPr/>
+        </p:nvSpPr>
+        <p:spPr>
+          <a:xfrm>
+            <a:off x="1631504" y="0"/>
+            <a:ext cx="4572000" cy="369332"/>
+          </a:xfrm>
+          <a:prstGeom prst="rect">
+            <a:avLst/>
+          </a:prstGeom>
+          <a:noFill/>
+        </p:spPr>
+        <p:txBody>
+          <a:bodyPr wrap="square">
+            <a:spAutoFit/>
+          </a:bodyPr>
+          <a:lstStyle/>
+          <a:p>
+            <a:r>
+              <a:rPr lang="es-AR" b="1" dirty="0"/>
+              <a:t>Informalidad (Sector/Empleo)</a:t>
+            </a:r>
+            <a:endParaRPr lang="es-AR" dirty="0"/>
+          </a:p>
+        </p:txBody>
+      </p:sp>
+    </p:spTree>
+    <p:extLst>
+      <p:ext uri="{BB962C8B-B14F-4D97-AF65-F5344CB8AC3E}">
+        <p14:creationId xmlns:p14="http://schemas.microsoft.com/office/powerpoint/2010/main" val="1705180333"/>
+      </p:ext>
+    </p:extLst>
+  </p:cSld>
+  <p:clrMapOvr>
+    <a:masterClrMapping/>
+  </p:clrMapOvr>
+</p:sld>
+</file>
+
+<file path=ppt/slides/slide22.xml><?xml version="1.0" encoding="utf-8"?>
+<p:sld xmlns:a="http://schemas.openxmlformats.org/drawingml/2006/main" xmlns:r="http://schemas.openxmlformats.org/officeDocument/2006/relationships" xmlns:p="http://schemas.openxmlformats.org/presentationml/2006/main">
+  <p:cSld>
+    <p:spTree>
+      <p:nvGrpSpPr>
+        <p:cNvPr id="1" name="">
+          <a:extLst>
+            <a:ext uri="{FF2B5EF4-FFF2-40B4-BE49-F238E27FC236}">
+              <a16:creationId xmlns:a16="http://schemas.microsoft.com/office/drawing/2014/main" id="{2CE7241E-217C-AA33-C0C9-771C79E91D5C}"/>
+            </a:ext>
+          </a:extLst>
+        </p:cNvPr>
+        <p:cNvGrpSpPr/>
+        <p:nvPr/>
+      </p:nvGrpSpPr>
+      <p:grpSpPr>
+        <a:xfrm>
+          <a:off x="0" y="0"/>
+          <a:ext cx="0" cy="0"/>
+          <a:chOff x="0" y="0"/>
+          <a:chExt cx="0" cy="0"/>
+        </a:xfrm>
+      </p:grpSpPr>
+      <p:pic>
+        <p:nvPicPr>
+          <p:cNvPr id="7" name="Imagen 6">
+            <a:extLst>
+              <a:ext uri="{FF2B5EF4-FFF2-40B4-BE49-F238E27FC236}">
+                <a16:creationId xmlns:a16="http://schemas.microsoft.com/office/drawing/2014/main" id="{8180A8C6-080B-BC6A-47EC-6704F12FB782}"/>
+              </a:ext>
+            </a:extLst>
+          </p:cNvPr>
+          <p:cNvPicPr>
+            <a:picLocks noChangeAspect="1"/>
+          </p:cNvPicPr>
+          <p:nvPr/>
+        </p:nvPicPr>
+        <p:blipFill>
+          <a:blip r:embed="rId2"/>
+          <a:stretch>
+            <a:fillRect/>
+          </a:stretch>
+        </p:blipFill>
+        <p:spPr>
+          <a:xfrm>
+            <a:off x="2711624" y="332657"/>
+            <a:ext cx="6336704" cy="6676007"/>
+          </a:xfrm>
+          <a:prstGeom prst="rect">
+            <a:avLst/>
+          </a:prstGeom>
+        </p:spPr>
+      </p:pic>
+      <p:sp>
+        <p:nvSpPr>
+          <p:cNvPr id="11" name="CuadroTexto 10">
+            <a:extLst>
+              <a:ext uri="{FF2B5EF4-FFF2-40B4-BE49-F238E27FC236}">
+                <a16:creationId xmlns:a16="http://schemas.microsoft.com/office/drawing/2014/main" id="{F992CCE9-DBB5-D2B5-EE7F-0EB6BB5C5A75}"/>
+              </a:ext>
+            </a:extLst>
+          </p:cNvPr>
+          <p:cNvSpPr txBox="1"/>
+          <p:nvPr/>
+        </p:nvSpPr>
+        <p:spPr>
+          <a:xfrm>
+            <a:off x="1631504" y="0"/>
+            <a:ext cx="4572000" cy="369332"/>
+          </a:xfrm>
+          <a:prstGeom prst="rect">
+            <a:avLst/>
+          </a:prstGeom>
+          <a:noFill/>
+        </p:spPr>
+        <p:txBody>
+          <a:bodyPr wrap="square">
+            <a:spAutoFit/>
+          </a:bodyPr>
+          <a:lstStyle/>
+          <a:p>
+            <a:r>
+              <a:rPr lang="es-AR" b="1" dirty="0"/>
+              <a:t>Informalidad (Sector/Empleo)</a:t>
+            </a:r>
+            <a:endParaRPr lang="es-AR" dirty="0"/>
+          </a:p>
+        </p:txBody>
+      </p:sp>
+    </p:spTree>
+    <p:extLst>
+      <p:ext uri="{BB962C8B-B14F-4D97-AF65-F5344CB8AC3E}">
+        <p14:creationId xmlns:p14="http://schemas.microsoft.com/office/powerpoint/2010/main" val="491235945"/>
+      </p:ext>
+    </p:extLst>
+  </p:cSld>
+  <p:clrMapOvr>
+    <a:masterClrMapping/>
+  </p:clrMapOvr>
+</p:sld>
+</file>
+
+<file path=ppt/slides/slide23.xml><?xml version="1.0" encoding="utf-8"?>
+<p:sld xmlns:a="http://schemas.openxmlformats.org/drawingml/2006/main" xmlns:r="http://schemas.openxmlformats.org/officeDocument/2006/relationships" xmlns:p="http://schemas.openxmlformats.org/presentationml/2006/main">
+  <p:cSld>
+    <p:spTree>
+      <p:nvGrpSpPr>
+        <p:cNvPr id="1" name="">
+          <a:extLst>
+            <a:ext uri="{FF2B5EF4-FFF2-40B4-BE49-F238E27FC236}">
+              <a16:creationId xmlns:a16="http://schemas.microsoft.com/office/drawing/2014/main" id="{459C8092-217C-1243-1AD2-DA56420D9242}"/>
+            </a:ext>
+          </a:extLst>
+        </p:cNvPr>
+        <p:cNvGrpSpPr/>
+        <p:nvPr/>
+      </p:nvGrpSpPr>
+      <p:grpSpPr>
+        <a:xfrm>
+          <a:off x="0" y="0"/>
+          <a:ext cx="0" cy="0"/>
+          <a:chOff x="0" y="0"/>
+          <a:chExt cx="0" cy="0"/>
+        </a:xfrm>
+      </p:grpSpPr>
+      <p:pic>
+        <p:nvPicPr>
+          <p:cNvPr id="3" name="Imagen 2">
+            <a:extLst>
+              <a:ext uri="{FF2B5EF4-FFF2-40B4-BE49-F238E27FC236}">
+                <a16:creationId xmlns:a16="http://schemas.microsoft.com/office/drawing/2014/main" id="{FAFF162E-B292-BACC-5218-CB579B121391}"/>
+              </a:ext>
+            </a:extLst>
+          </p:cNvPr>
+          <p:cNvPicPr>
+            <a:picLocks noChangeAspect="1"/>
+          </p:cNvPicPr>
+          <p:nvPr/>
+        </p:nvPicPr>
+        <p:blipFill>
+          <a:blip r:embed="rId2"/>
+          <a:stretch>
+            <a:fillRect/>
+          </a:stretch>
+        </p:blipFill>
+        <p:spPr>
+          <a:xfrm>
+            <a:off x="1847528" y="260648"/>
+            <a:ext cx="8012366" cy="6336704"/>
+          </a:xfrm>
+          <a:prstGeom prst="rect">
+            <a:avLst/>
+          </a:prstGeom>
+        </p:spPr>
+      </p:pic>
+      <p:sp>
+        <p:nvSpPr>
+          <p:cNvPr id="4" name="CuadroTexto 3">
+            <a:extLst>
+              <a:ext uri="{FF2B5EF4-FFF2-40B4-BE49-F238E27FC236}">
+                <a16:creationId xmlns:a16="http://schemas.microsoft.com/office/drawing/2014/main" id="{D1BEC7AA-5256-7036-0D2E-40A176DF8BBE}"/>
+              </a:ext>
+            </a:extLst>
+          </p:cNvPr>
+          <p:cNvSpPr txBox="1"/>
+          <p:nvPr/>
+        </p:nvSpPr>
+        <p:spPr>
+          <a:xfrm>
+            <a:off x="1631504" y="0"/>
+            <a:ext cx="4572000" cy="369332"/>
+          </a:xfrm>
+          <a:prstGeom prst="rect">
+            <a:avLst/>
+          </a:prstGeom>
+          <a:noFill/>
+        </p:spPr>
+        <p:txBody>
+          <a:bodyPr wrap="square">
+            <a:spAutoFit/>
+          </a:bodyPr>
+          <a:lstStyle/>
+          <a:p>
+            <a:r>
+              <a:rPr lang="es-AR" b="1" dirty="0"/>
+              <a:t>Informalidad (Sector/Empleo)</a:t>
+            </a:r>
+            <a:endParaRPr lang="es-AR" dirty="0"/>
+          </a:p>
+        </p:txBody>
+      </p:sp>
+    </p:spTree>
+    <p:extLst>
+      <p:ext uri="{BB962C8B-B14F-4D97-AF65-F5344CB8AC3E}">
+        <p14:creationId xmlns:p14="http://schemas.microsoft.com/office/powerpoint/2010/main" val="1369000508"/>
+      </p:ext>
+    </p:extLst>
+  </p:cSld>
+  <p:clrMapOvr>
+    <a:masterClrMapping/>
+  </p:clrMapOvr>
+</p:sld>
+</file>
+
 <file path=ppt/slides/slide3.xml><?xml version="1.0" encoding="utf-8"?>
 <p:sld xmlns:a="http://schemas.openxmlformats.org/drawingml/2006/main" xmlns:r="http://schemas.openxmlformats.org/officeDocument/2006/relationships" xmlns:p="http://schemas.openxmlformats.org/presentationml/2006/main">
   <p:cSld>
@@ -12006,20 +12425,20 @@
 </file>
 
 <file path=customXml/item1.xml><?xml version="1.0" encoding="utf-8"?>
-<p:properties xmlns:p="http://schemas.microsoft.com/office/2006/metadata/properties" xmlns:xsi="http://www.w3.org/2001/XMLSchema-instance" xmlns:pc="http://schemas.microsoft.com/office/infopath/2007/PartnerControls">
-  <documentManagement>
-    <_activity xmlns="73ecfec2-fe59-4214-9cad-f553ff4d189b" xsi:nil="true"/>
-  </documentManagement>
-</p:properties>
-</file>
-
-<file path=customXml/item2.xml><?xml version="1.0" encoding="utf-8"?>
 <?mso-contentType ?>
 <FormTemplates xmlns="http://schemas.microsoft.com/sharepoint/v3/contenttype/forms">
   <Display>DocumentLibraryForm</Display>
   <Edit>DocumentLibraryForm</Edit>
   <New>DocumentLibraryForm</New>
 </FormTemplates>
+</file>
+
+<file path=customXml/item2.xml><?xml version="1.0" encoding="utf-8"?>
+<p:properties xmlns:p="http://schemas.microsoft.com/office/2006/metadata/properties" xmlns:xsi="http://www.w3.org/2001/XMLSchema-instance" xmlns:pc="http://schemas.microsoft.com/office/infopath/2007/PartnerControls">
+  <documentManagement>
+    <_activity xmlns="73ecfec2-fe59-4214-9cad-f553ff4d189b" xsi:nil="true"/>
+  </documentManagement>
+</p:properties>
 </file>
 
 <file path=customXml/item3.xml><?xml version="1.0" encoding="utf-8"?>
@@ -12173,6 +12592,14 @@
 </file>
 
 <file path=customXml/itemProps1.xml><?xml version="1.0" encoding="utf-8"?>
+<ds:datastoreItem xmlns:ds="http://schemas.openxmlformats.org/officeDocument/2006/customXml" ds:itemID="{75669B48-8959-4D7D-9AAA-BC16556B4A29}">
+  <ds:schemaRefs>
+    <ds:schemaRef ds:uri="http://schemas.microsoft.com/sharepoint/v3/contenttype/forms"/>
+  </ds:schemaRefs>
+</ds:datastoreItem>
+</file>
+
+<file path=customXml/itemProps2.xml><?xml version="1.0" encoding="utf-8"?>
 <ds:datastoreItem xmlns:ds="http://schemas.openxmlformats.org/officeDocument/2006/customXml" ds:itemID="{A0607A6D-E8B8-4AA3-9E0C-8E15E1BEA06E}">
   <ds:schemaRefs>
     <ds:schemaRef ds:uri="http://purl.org/dc/terms/"/>
@@ -12184,14 +12611,6 @@
     <ds:schemaRef ds:uri="http://schemas.microsoft.com/office/infopath/2007/PartnerControls"/>
     <ds:schemaRef ds:uri="73ecfec2-fe59-4214-9cad-f553ff4d189b"/>
     <ds:schemaRef ds:uri="http://purl.org/dc/dcmitype/"/>
-  </ds:schemaRefs>
-</ds:datastoreItem>
-</file>
-
-<file path=customXml/itemProps2.xml><?xml version="1.0" encoding="utf-8"?>
-<ds:datastoreItem xmlns:ds="http://schemas.openxmlformats.org/officeDocument/2006/customXml" ds:itemID="{75669B48-8959-4D7D-9AAA-BC16556B4A29}">
-  <ds:schemaRefs>
-    <ds:schemaRef ds:uri="http://schemas.microsoft.com/sharepoint/v3/contenttype/forms"/>
   </ds:schemaRefs>
 </ds:datastoreItem>
 </file>

--- a/Clase 2 - EPH e Intro a Tidyverse/Presentación EPH.pptx
+++ b/Clase 2 - EPH e Intro a Tidyverse/Presentación EPH.pptx
@@ -2,7 +2,7 @@
 <file path=ppt/presentation.xml><?xml version="1.0" encoding="utf-8"?>
 <p:presentation xmlns:a="http://schemas.openxmlformats.org/drawingml/2006/main" xmlns:r="http://schemas.openxmlformats.org/officeDocument/2006/relationships" xmlns:p="http://schemas.openxmlformats.org/presentationml/2006/main" saveSubsetFonts="1" autoCompressPictures="0">
   <p:sldMasterIdLst>
-    <p:sldMasterId id="2147483696" r:id="rId4"/>
+    <p:sldMasterId id="2147483708" r:id="rId4"/>
   </p:sldMasterIdLst>
   <p:notesMasterIdLst>
     <p:notesMasterId r:id="rId28"/>
@@ -219,7 +219,7 @@
           <a:p>
             <a:fld id="{30269C05-07A3-4C0B-B452-D73BEED39343}" type="datetimeFigureOut">
               <a:rPr lang="es-ES" smtClean="0"/>
-              <a:t>30/04/2026</a:t>
+              <a:t>08/05/2026</a:t>
             </a:fld>
             <a:endParaRPr lang="es-ES"/>
           </a:p>
@@ -511,8 +511,8 @@
         </p:nvSpPr>
         <p:spPr>
           <a:xfrm>
-            <a:off x="3175" y="6400800"/>
-            <a:ext cx="12188825" cy="457200"/>
+            <a:off x="1" y="6400800"/>
+            <a:ext cx="12192000" cy="457200"/>
           </a:xfrm>
           <a:prstGeom prst="rect">
             <a:avLst/>
@@ -540,13 +540,6 @@
             <a:schemeClr val="lt1"/>
           </a:fontRef>
         </p:style>
-        <p:txBody>
-          <a:bodyPr/>
-          <a:lstStyle/>
-          <a:p>
-            <a:endParaRPr lang="es-AR"/>
-          </a:p>
-        </p:txBody>
       </p:sp>
       <p:sp>
         <p:nvSpPr>
@@ -556,8 +549,8 @@
         </p:nvSpPr>
         <p:spPr>
           <a:xfrm>
-            <a:off x="15" y="6334316"/>
-            <a:ext cx="12188825" cy="64008"/>
+            <a:off x="1" y="6334316"/>
+            <a:ext cx="12192000" cy="66484"/>
           </a:xfrm>
           <a:prstGeom prst="rect">
             <a:avLst/>
@@ -585,13 +578,6 @@
             <a:schemeClr val="lt1"/>
           </a:fontRef>
         </p:style>
-        <p:txBody>
-          <a:bodyPr/>
-          <a:lstStyle/>
-          <a:p>
-            <a:endParaRPr lang="es-AR"/>
-          </a:p>
-        </p:txBody>
       </p:sp>
       <p:sp>
         <p:nvSpPr>
@@ -649,7 +635,7 @@
         </p:nvSpPr>
         <p:spPr>
           <a:xfrm>
-            <a:off x="1100051" y="4455620"/>
+            <a:off x="1100051" y="4455621"/>
             <a:ext cx="10058400" cy="1143000"/>
           </a:xfrm>
         </p:spPr>
@@ -726,7 +712,7 @@
           <a:p>
             <a:fld id="{1B3EF8C8-B97B-4B8B-89DD-60B674DEC85F}" type="datetime4">
               <a:rPr lang="es-ES" smtClean="0"/>
-              <a:t>30 de abril de 2026</a:t>
+              <a:t>8 de mayo de 2026</a:t>
             </a:fld>
             <a:endParaRPr lang="en-US"/>
           </a:p>
@@ -815,7 +801,7 @@
     </p:spTree>
     <p:extLst>
       <p:ext uri="{BB962C8B-B14F-4D97-AF65-F5344CB8AC3E}">
-        <p14:creationId xmlns:p14="http://schemas.microsoft.com/office/powerpoint/2010/main" val="834262541"/>
+        <p14:creationId xmlns:p14="http://schemas.microsoft.com/office/powerpoint/2010/main" val="3665938146"/>
       </p:ext>
     </p:extLst>
   </p:cSld>
@@ -935,7 +921,7 @@
           <a:p>
             <a:fld id="{1B3EF8C8-B97B-4B8B-89DD-60B674DEC85F}" type="datetime4">
               <a:rPr lang="es-ES" smtClean="0"/>
-              <a:t>30 de abril de 2026</a:t>
+              <a:t>8 de mayo de 2026</a:t>
             </a:fld>
             <a:endParaRPr lang="en-US"/>
           </a:p>
@@ -986,7 +972,7 @@
     </p:spTree>
     <p:extLst>
       <p:ext uri="{BB962C8B-B14F-4D97-AF65-F5344CB8AC3E}">
-        <p14:creationId xmlns:p14="http://schemas.microsoft.com/office/powerpoint/2010/main" val="429730180"/>
+        <p14:creationId xmlns:p14="http://schemas.microsoft.com/office/powerpoint/2010/main" val="3265750479"/>
       </p:ext>
     </p:extLst>
   </p:cSld>
@@ -1102,8 +1088,8 @@
         </p:nvSpPr>
         <p:spPr>
           <a:xfrm>
-            <a:off x="8724900" y="414778"/>
-            <a:ext cx="2628900" cy="5757421"/>
+            <a:off x="8724900" y="412302"/>
+            <a:ext cx="2628900" cy="5759898"/>
           </a:xfrm>
         </p:spPr>
         <p:txBody>
@@ -1130,8 +1116,8 @@
         </p:nvSpPr>
         <p:spPr>
           <a:xfrm>
-            <a:off x="838200" y="414778"/>
-            <a:ext cx="7734300" cy="5757422"/>
+            <a:off x="838200" y="412302"/>
+            <a:ext cx="7734300" cy="5759898"/>
           </a:xfrm>
         </p:spPr>
         <p:txBody>
@@ -1192,7 +1178,7 @@
           <a:p>
             <a:fld id="{1B3EF8C8-B97B-4B8B-89DD-60B674DEC85F}" type="datetime4">
               <a:rPr lang="es-ES" smtClean="0"/>
-              <a:t>30 de abril de 2026</a:t>
+              <a:t>8 de mayo de 2026</a:t>
             </a:fld>
             <a:endParaRPr lang="en-US"/>
           </a:p>
@@ -1243,7 +1229,7 @@
     </p:spTree>
     <p:extLst>
       <p:ext uri="{BB962C8B-B14F-4D97-AF65-F5344CB8AC3E}">
-        <p14:creationId xmlns:p14="http://schemas.microsoft.com/office/powerpoint/2010/main" val="2052123907"/>
+        <p14:creationId xmlns:p14="http://schemas.microsoft.com/office/powerpoint/2010/main" val="1097198907"/>
       </p:ext>
     </p:extLst>
   </p:cSld>
@@ -1284,11 +1270,7 @@
         <p:spPr/>
         <p:txBody>
           <a:bodyPr/>
-          <a:lstStyle>
-            <a:lvl1pPr marL="0">
-              <a:defRPr/>
-            </a:lvl1pPr>
-          </a:lstStyle>
+          <a:lstStyle/>
           <a:p>
             <a:r>
               <a:rPr lang="es-ES"/>
@@ -1367,7 +1349,7 @@
           <a:p>
             <a:fld id="{1B3EF8C8-B97B-4B8B-89DD-60B674DEC85F}" type="datetime4">
               <a:rPr lang="es-ES" smtClean="0"/>
-              <a:t>30 de abril de 2026</a:t>
+              <a:t>8 de mayo de 2026</a:t>
             </a:fld>
             <a:endParaRPr lang="en-US"/>
           </a:p>
@@ -1418,7 +1400,7 @@
     </p:spTree>
     <p:extLst>
       <p:ext uri="{BB962C8B-B14F-4D97-AF65-F5344CB8AC3E}">
-        <p14:creationId xmlns:p14="http://schemas.microsoft.com/office/powerpoint/2010/main" val="3955970478"/>
+        <p14:creationId xmlns:p14="http://schemas.microsoft.com/office/powerpoint/2010/main" val="1231923202"/>
       </p:ext>
     </p:extLst>
   </p:cSld>
@@ -1711,7 +1693,7 @@
           <a:p>
             <a:fld id="{1B3EF8C8-B97B-4B8B-89DD-60B674DEC85F}" type="datetime4">
               <a:rPr lang="es-ES" smtClean="0"/>
-              <a:t>30 de abril de 2026</a:t>
+              <a:t>8 de mayo de 2026</a:t>
             </a:fld>
             <a:endParaRPr lang="en-US"/>
           </a:p>
@@ -1800,7 +1782,7 @@
     </p:spTree>
     <p:extLst>
       <p:ext uri="{BB962C8B-B14F-4D97-AF65-F5344CB8AC3E}">
-        <p14:creationId xmlns:p14="http://schemas.microsoft.com/office/powerpoint/2010/main" val="3654824078"/>
+        <p14:creationId xmlns:p14="http://schemas.microsoft.com/office/powerpoint/2010/main" val="3248864013"/>
       </p:ext>
     </p:extLst>
   </p:cSld>
@@ -1868,8 +1850,8 @@
         </p:nvSpPr>
         <p:spPr>
           <a:xfrm>
-            <a:off x="1097279" y="1845734"/>
-            <a:ext cx="4937760" cy="4023360"/>
+            <a:off x="1097280" y="1845734"/>
+            <a:ext cx="4937760" cy="4023359"/>
           </a:xfrm>
         </p:spPr>
         <p:txBody>
@@ -1987,7 +1969,7 @@
           <a:p>
             <a:fld id="{1B3EF8C8-B97B-4B8B-89DD-60B674DEC85F}" type="datetime4">
               <a:rPr lang="es-ES" smtClean="0"/>
-              <a:t>30 de abril de 2026</a:t>
+              <a:t>8 de mayo de 2026</a:t>
             </a:fld>
             <a:endParaRPr lang="en-US"/>
           </a:p>
@@ -2038,7 +2020,7 @@
     </p:spTree>
     <p:extLst>
       <p:ext uri="{BB962C8B-B14F-4D97-AF65-F5344CB8AC3E}">
-        <p14:creationId xmlns:p14="http://schemas.microsoft.com/office/powerpoint/2010/main" val="907881053"/>
+        <p14:creationId xmlns:p14="http://schemas.microsoft.com/office/powerpoint/2010/main" val="1237575251"/>
       </p:ext>
     </p:extLst>
   </p:cSld>
@@ -2177,8 +2159,8 @@
         </p:nvSpPr>
         <p:spPr>
           <a:xfrm>
-            <a:off x="1097280" y="2582334"/>
-            <a:ext cx="4937760" cy="3378200"/>
+            <a:off x="1097280" y="2582335"/>
+            <a:ext cx="4937760" cy="3286760"/>
           </a:xfrm>
         </p:spPr>
         <p:txBody>
@@ -2306,7 +2288,7 @@
         <p:spPr>
           <a:xfrm>
             <a:off x="6217920" y="2582334"/>
-            <a:ext cx="4937760" cy="3378200"/>
+            <a:ext cx="4937760" cy="3286760"/>
           </a:xfrm>
         </p:spPr>
         <p:txBody>
@@ -2367,7 +2349,7 @@
           <a:p>
             <a:fld id="{1B3EF8C8-B97B-4B8B-89DD-60B674DEC85F}" type="datetime4">
               <a:rPr lang="es-ES" smtClean="0"/>
-              <a:t>30 de abril de 2026</a:t>
+              <a:t>8 de mayo de 2026</a:t>
             </a:fld>
             <a:endParaRPr lang="en-US"/>
           </a:p>
@@ -2418,7 +2400,7 @@
     </p:spTree>
     <p:extLst>
       <p:ext uri="{BB962C8B-B14F-4D97-AF65-F5344CB8AC3E}">
-        <p14:creationId xmlns:p14="http://schemas.microsoft.com/office/powerpoint/2010/main" val="4162738271"/>
+        <p14:creationId xmlns:p14="http://schemas.microsoft.com/office/powerpoint/2010/main" val="2989721415"/>
       </p:ext>
     </p:extLst>
   </p:cSld>
@@ -2486,7 +2468,7 @@
           <a:p>
             <a:fld id="{1B3EF8C8-B97B-4B8B-89DD-60B674DEC85F}" type="datetime4">
               <a:rPr lang="es-ES" smtClean="0"/>
-              <a:t>30 de abril de 2026</a:t>
+              <a:t>8 de mayo de 2026</a:t>
             </a:fld>
             <a:endParaRPr lang="en-US"/>
           </a:p>
@@ -2537,7 +2519,7 @@
     </p:spTree>
     <p:extLst>
       <p:ext uri="{BB962C8B-B14F-4D97-AF65-F5344CB8AC3E}">
-        <p14:creationId xmlns:p14="http://schemas.microsoft.com/office/powerpoint/2010/main" val="1182302308"/>
+        <p14:creationId xmlns:p14="http://schemas.microsoft.com/office/powerpoint/2010/main" val="1856248388"/>
       </p:ext>
     </p:extLst>
   </p:cSld>
@@ -2658,7 +2640,7 @@
           <a:p>
             <a:fld id="{1B3EF8C8-B97B-4B8B-89DD-60B674DEC85F}" type="datetime4">
               <a:rPr lang="es-ES" smtClean="0"/>
-              <a:t>30 de abril de 2026</a:t>
+              <a:t>8 de mayo de 2026</a:t>
             </a:fld>
             <a:endParaRPr lang="en-US"/>
           </a:p>
@@ -2717,7 +2699,7 @@
     </p:spTree>
     <p:extLst>
       <p:ext uri="{BB962C8B-B14F-4D97-AF65-F5344CB8AC3E}">
-        <p14:creationId xmlns:p14="http://schemas.microsoft.com/office/powerpoint/2010/main" val="3805144779"/>
+        <p14:creationId xmlns:p14="http://schemas.microsoft.com/office/powerpoint/2010/main" val="23385793"/>
       </p:ext>
     </p:extLst>
   </p:cSld>
@@ -3013,7 +2995,7 @@
           <a:p>
             <a:fld id="{1B3EF8C8-B97B-4B8B-89DD-60B674DEC85F}" type="datetime4">
               <a:rPr lang="es-ES" smtClean="0"/>
-              <a:t>30 de abril de 2026</a:t>
+              <a:t>8 de mayo de 2026</a:t>
             </a:fld>
             <a:endParaRPr lang="en-US"/>
           </a:p>
@@ -3085,7 +3067,7 @@
     </p:spTree>
     <p:extLst>
       <p:ext uri="{BB962C8B-B14F-4D97-AF65-F5344CB8AC3E}">
-        <p14:creationId xmlns:p14="http://schemas.microsoft.com/office/powerpoint/2010/main" val="465028929"/>
+        <p14:creationId xmlns:p14="http://schemas.microsoft.com/office/powerpoint/2010/main" val="1392527197"/>
       </p:ext>
     </p:extLst>
   </p:cSld>
@@ -3202,11 +3184,11 @@
         <p:spPr>
           <a:xfrm>
             <a:off x="1097280" y="5074920"/>
-            <a:ext cx="10113264" cy="822960"/>
+            <a:ext cx="10113645" cy="822960"/>
           </a:xfrm>
         </p:spPr>
         <p:txBody>
-          <a:bodyPr lIns="91440" tIns="0" rIns="91440" bIns="0" anchor="b">
+          <a:bodyPr tIns="0" bIns="0" anchor="b">
             <a:noAutofit/>
           </a:bodyPr>
           <a:lstStyle>
@@ -3242,23 +3224,18 @@
             <a:off x="15" y="0"/>
             <a:ext cx="12191985" cy="4915076"/>
           </a:xfrm>
-          <a:blipFill>
-            <a:blip r:embed="rId2"/>
-            <a:stretch>
-              <a:fillRect/>
-            </a:stretch>
-          </a:blipFill>
+          <a:solidFill>
+            <a:schemeClr val="bg2">
+              <a:lumMod val="90000"/>
+            </a:schemeClr>
+          </a:solidFill>
         </p:spPr>
         <p:txBody>
           <a:bodyPr lIns="457200" tIns="457200" anchor="t"/>
           <a:lstStyle>
             <a:lvl1pPr marL="0" indent="0">
               <a:buNone/>
-              <a:defRPr sz="3200">
-                <a:solidFill>
-                  <a:schemeClr val="bg1"/>
-                </a:solidFill>
-              </a:defRPr>
+              <a:defRPr sz="3200"/>
             </a:lvl1pPr>
             <a:lvl2pPr marL="457200" indent="0">
               <a:buNone/>
@@ -3314,7 +3291,7 @@
         </p:nvSpPr>
         <p:spPr>
           <a:xfrm>
-            <a:off x="1097280" y="5907023"/>
+            <a:off x="1097280" y="5907024"/>
             <a:ext cx="10113264" cy="594360"/>
           </a:xfrm>
         </p:spPr>
@@ -3396,7 +3373,7 @@
           <a:p>
             <a:fld id="{1B3EF8C8-B97B-4B8B-89DD-60B674DEC85F}" type="datetime4">
               <a:rPr lang="es-ES" smtClean="0"/>
-              <a:t>30 de abril de 2026</a:t>
+              <a:t>8 de mayo de 2026</a:t>
             </a:fld>
             <a:endParaRPr lang="en-US"/>
           </a:p>
@@ -3447,7 +3424,7 @@
     </p:spTree>
     <p:extLst>
       <p:ext uri="{BB962C8B-B14F-4D97-AF65-F5344CB8AC3E}">
-        <p14:creationId xmlns:p14="http://schemas.microsoft.com/office/powerpoint/2010/main" val="542427902"/>
+        <p14:creationId xmlns:p14="http://schemas.microsoft.com/office/powerpoint/2010/main" val="1984536086"/>
       </p:ext>
     </p:extLst>
   </p:cSld>
@@ -3488,8 +3465,8 @@
         </p:nvSpPr>
         <p:spPr>
           <a:xfrm>
-            <a:off x="1" y="6400800"/>
-            <a:ext cx="12192000" cy="457200"/>
+            <a:off x="3175" y="6400800"/>
+            <a:ext cx="12188825" cy="457200"/>
           </a:xfrm>
           <a:prstGeom prst="rect">
             <a:avLst/>
@@ -3517,13 +3494,6 @@
             <a:schemeClr val="lt1"/>
           </a:fontRef>
         </p:style>
-        <p:txBody>
-          <a:bodyPr/>
-          <a:lstStyle/>
-          <a:p>
-            <a:endParaRPr lang="es-AR"/>
-          </a:p>
-        </p:txBody>
       </p:sp>
       <p:sp>
         <p:nvSpPr>
@@ -3533,8 +3503,8 @@
         </p:nvSpPr>
         <p:spPr>
           <a:xfrm>
-            <a:off x="0" y="6334316"/>
-            <a:ext cx="12192001" cy="65998"/>
+            <a:off x="15" y="6334316"/>
+            <a:ext cx="12188825" cy="64008"/>
           </a:xfrm>
           <a:prstGeom prst="rect">
             <a:avLst/>
@@ -3562,13 +3532,6 @@
             <a:schemeClr val="lt1"/>
           </a:fontRef>
         </p:style>
-        <p:txBody>
-          <a:bodyPr/>
-          <a:lstStyle/>
-          <a:p>
-            <a:endParaRPr lang="es-AR"/>
-          </a:p>
-        </p:txBody>
       </p:sp>
       <p:sp>
         <p:nvSpPr>
@@ -3698,7 +3661,7 @@
           <a:p>
             <a:fld id="{1B3EF8C8-B97B-4B8B-89DD-60B674DEC85F}" type="datetime4">
               <a:rPr lang="es-ES" smtClean="0"/>
-              <a:t>30 de abril de 2026</a:t>
+              <a:t>8 de mayo de 2026</a:t>
             </a:fld>
             <a:endParaRPr lang="en-US"/>
           </a:p>
@@ -3819,23 +3782,23 @@
     </p:spTree>
     <p:extLst>
       <p:ext uri="{BB962C8B-B14F-4D97-AF65-F5344CB8AC3E}">
-        <p14:creationId xmlns:p14="http://schemas.microsoft.com/office/powerpoint/2010/main" val="4026812627"/>
+        <p14:creationId xmlns:p14="http://schemas.microsoft.com/office/powerpoint/2010/main" val="3300682808"/>
       </p:ext>
     </p:extLst>
   </p:cSld>
   <p:clrMap bg1="lt1" tx1="dk1" bg2="lt2" tx2="dk2" accent1="accent1" accent2="accent2" accent3="accent3" accent4="accent4" accent5="accent5" accent6="accent6" hlink="hlink" folHlink="folHlink"/>
   <p:sldLayoutIdLst>
-    <p:sldLayoutId id="2147483697" r:id="rId1"/>
-    <p:sldLayoutId id="2147483698" r:id="rId2"/>
-    <p:sldLayoutId id="2147483699" r:id="rId3"/>
-    <p:sldLayoutId id="2147483700" r:id="rId4"/>
-    <p:sldLayoutId id="2147483701" r:id="rId5"/>
-    <p:sldLayoutId id="2147483702" r:id="rId6"/>
-    <p:sldLayoutId id="2147483703" r:id="rId7"/>
-    <p:sldLayoutId id="2147483704" r:id="rId8"/>
-    <p:sldLayoutId id="2147483705" r:id="rId9"/>
-    <p:sldLayoutId id="2147483706" r:id="rId10"/>
-    <p:sldLayoutId id="2147483707" r:id="rId11"/>
+    <p:sldLayoutId id="2147483709" r:id="rId1"/>
+    <p:sldLayoutId id="2147483710" r:id="rId2"/>
+    <p:sldLayoutId id="2147483711" r:id="rId3"/>
+    <p:sldLayoutId id="2147483712" r:id="rId4"/>
+    <p:sldLayoutId id="2147483713" r:id="rId5"/>
+    <p:sldLayoutId id="2147483714" r:id="rId6"/>
+    <p:sldLayoutId id="2147483715" r:id="rId7"/>
+    <p:sldLayoutId id="2147483716" r:id="rId8"/>
+    <p:sldLayoutId id="2147483717" r:id="rId9"/>
+    <p:sldLayoutId id="2147483718" r:id="rId10"/>
+    <p:sldLayoutId id="2147483719" r:id="rId11"/>
   </p:sldLayoutIdLst>
   <p:hf sldNum="0" hdr="0" ftr="0"/>
   <p:txStyles>
@@ -4620,6 +4583,39 @@
       </p:grpSpPr>
       <p:sp>
         <p:nvSpPr>
+          <p:cNvPr id="4" name="Título 1">
+            <a:extLst>
+              <a:ext uri="{FF2B5EF4-FFF2-40B4-BE49-F238E27FC236}">
+                <a16:creationId xmlns:a16="http://schemas.microsoft.com/office/drawing/2014/main" id="{8CCE0698-A016-9FCD-E3B7-B067CC367CE3}"/>
+              </a:ext>
+            </a:extLst>
+          </p:cNvPr>
+          <p:cNvSpPr>
+            <a:spLocks noGrp="1"/>
+          </p:cNvSpPr>
+          <p:nvPr>
+            <p:ph type="title"/>
+          </p:nvPr>
+        </p:nvSpPr>
+        <p:spPr>
+          <a:xfrm>
+            <a:off x="838200" y="365125"/>
+            <a:ext cx="10515600" cy="1325563"/>
+          </a:xfrm>
+        </p:spPr>
+        <p:txBody>
+          <a:bodyPr/>
+          <a:lstStyle/>
+          <a:p>
+            <a:r>
+              <a:rPr lang="es-AR" dirty="0"/>
+              <a:t>Criterios de la condición de actividad</a:t>
+            </a:r>
+          </a:p>
+        </p:txBody>
+      </p:sp>
+      <p:sp>
+        <p:nvSpPr>
           <p:cNvPr id="3" name="Marcador de contenido 2">
             <a:extLst>
               <a:ext uri="{FF2B5EF4-FFF2-40B4-BE49-F238E27FC236}">
@@ -4750,39 +4746,6 @@
               <a:t>en el período de referencia no estaban ocupadas ni desocupadas</a:t>
             </a:r>
             <a:endParaRPr lang="es-ES" dirty="0"/>
-          </a:p>
-        </p:txBody>
-      </p:sp>
-      <p:sp>
-        <p:nvSpPr>
-          <p:cNvPr id="4" name="Título 1">
-            <a:extLst>
-              <a:ext uri="{FF2B5EF4-FFF2-40B4-BE49-F238E27FC236}">
-                <a16:creationId xmlns:a16="http://schemas.microsoft.com/office/drawing/2014/main" id="{8CCE0698-A016-9FCD-E3B7-B067CC367CE3}"/>
-              </a:ext>
-            </a:extLst>
-          </p:cNvPr>
-          <p:cNvSpPr>
-            <a:spLocks noGrp="1"/>
-          </p:cNvSpPr>
-          <p:nvPr>
-            <p:ph type="title"/>
-          </p:nvPr>
-        </p:nvSpPr>
-        <p:spPr>
-          <a:xfrm>
-            <a:off x="838200" y="365125"/>
-            <a:ext cx="10515600" cy="1325563"/>
-          </a:xfrm>
-        </p:spPr>
-        <p:txBody>
-          <a:bodyPr/>
-          <a:lstStyle/>
-          <a:p>
-            <a:r>
-              <a:rPr lang="es-AR" dirty="0"/>
-              <a:t>Criterios de la condición de actividad</a:t>
-            </a:r>
           </a:p>
         </p:txBody>
       </p:sp>
@@ -5366,6 +5329,39 @@
       </p:grpSpPr>
       <p:sp>
         <p:nvSpPr>
+          <p:cNvPr id="4" name="Título 1">
+            <a:extLst>
+              <a:ext uri="{FF2B5EF4-FFF2-40B4-BE49-F238E27FC236}">
+                <a16:creationId xmlns:a16="http://schemas.microsoft.com/office/drawing/2014/main" id="{8CCE0698-A016-9FCD-E3B7-B067CC367CE3}"/>
+              </a:ext>
+            </a:extLst>
+          </p:cNvPr>
+          <p:cNvSpPr>
+            <a:spLocks noGrp="1"/>
+          </p:cNvSpPr>
+          <p:nvPr>
+            <p:ph type="title"/>
+          </p:nvPr>
+        </p:nvSpPr>
+        <p:spPr>
+          <a:xfrm>
+            <a:off x="838200" y="365125"/>
+            <a:ext cx="10515600" cy="1325563"/>
+          </a:xfrm>
+        </p:spPr>
+        <p:txBody>
+          <a:bodyPr/>
+          <a:lstStyle/>
+          <a:p>
+            <a:r>
+              <a:rPr lang="es-AR" dirty="0"/>
+              <a:t>Criterios de la intensidad en la ocupación</a:t>
+            </a:r>
+          </a:p>
+        </p:txBody>
+      </p:sp>
+      <p:sp>
+        <p:nvSpPr>
           <p:cNvPr id="3" name="Marcador de contenido 2">
             <a:extLst>
               <a:ext uri="{FF2B5EF4-FFF2-40B4-BE49-F238E27FC236}">
@@ -5446,39 +5442,6 @@
             <a:r>
               <a:rPr lang="es-AR" dirty="0"/>
               <a:t>: aquellos que trabajan más de 35 horas y menos de 45, o aquellos que trabajando menos de 35 horas no cumplen las condiciones (2 y 3) de subocupación.</a:t>
-            </a:r>
-          </a:p>
-        </p:txBody>
-      </p:sp>
-      <p:sp>
-        <p:nvSpPr>
-          <p:cNvPr id="4" name="Título 1">
-            <a:extLst>
-              <a:ext uri="{FF2B5EF4-FFF2-40B4-BE49-F238E27FC236}">
-                <a16:creationId xmlns:a16="http://schemas.microsoft.com/office/drawing/2014/main" id="{8CCE0698-A016-9FCD-E3B7-B067CC367CE3}"/>
-              </a:ext>
-            </a:extLst>
-          </p:cNvPr>
-          <p:cNvSpPr>
-            <a:spLocks noGrp="1"/>
-          </p:cNvSpPr>
-          <p:nvPr>
-            <p:ph type="title"/>
-          </p:nvPr>
-        </p:nvSpPr>
-        <p:spPr>
-          <a:xfrm>
-            <a:off x="838200" y="365125"/>
-            <a:ext cx="10515600" cy="1325563"/>
-          </a:xfrm>
-        </p:spPr>
-        <p:txBody>
-          <a:bodyPr/>
-          <a:lstStyle/>
-          <a:p>
-            <a:r>
-              <a:rPr lang="es-AR" dirty="0"/>
-              <a:t>Criterios de la intensidad en la ocupación</a:t>
             </a:r>
           </a:p>
         </p:txBody>
@@ -7355,16 +7318,7 @@
                           </a:solidFill>
                           <a:latin typeface="Cambria Math" panose="02040503050406030204" pitchFamily="18" charset="0"/>
                         </a:rPr>
-                        <m:t>𝑎𝑐𝑡𝑖𝑣𝑖𝑑𝑎</m:t>
-                      </m:r>
-                      <m:r>
-                        <a:rPr lang="es-AR" i="1">
-                          <a:solidFill>
-                            <a:srgbClr val="000000"/>
-                          </a:solidFill>
-                          <a:latin typeface="Cambria Math" panose="02040503050406030204" pitchFamily="18" charset="0"/>
-                        </a:rPr>
-                        <m:t>𝑑</m:t>
+                        <m:t>𝑎𝑐𝑡𝑖𝑣𝑖𝑑𝑎𝑑</m:t>
                       </m:r>
                       <m:r>
                         <a:rPr lang="es-AR" i="1">
@@ -8988,63 +8942,6 @@
           </a:fontRef>
         </p:style>
       </p:cxnSp>
-      <p:sp>
-        <p:nvSpPr>
-          <p:cNvPr id="15" name="17 Rectángulo redondeado">
-            <a:extLst>
-              <a:ext uri="{FF2B5EF4-FFF2-40B4-BE49-F238E27FC236}">
-                <a16:creationId xmlns:a16="http://schemas.microsoft.com/office/drawing/2014/main" id="{F6E6AF6B-5AB6-5357-0B1B-9BAA986B0557}"/>
-              </a:ext>
-            </a:extLst>
-          </p:cNvPr>
-          <p:cNvSpPr/>
-          <p:nvPr/>
-        </p:nvSpPr>
-        <p:spPr>
-          <a:xfrm>
-            <a:off x="6871785" y="2621122"/>
-            <a:ext cx="360040" cy="357581"/>
-          </a:xfrm>
-          <a:prstGeom prst="roundRect">
-            <a:avLst/>
-          </a:prstGeom>
-          <a:solidFill>
-            <a:schemeClr val="bg1"/>
-          </a:solidFill>
-          <a:ln>
-            <a:noFill/>
-          </a:ln>
-        </p:spPr>
-        <p:style>
-          <a:lnRef idx="2">
-            <a:schemeClr val="accent1">
-              <a:shade val="50000"/>
-            </a:schemeClr>
-          </a:lnRef>
-          <a:fillRef idx="1">
-            <a:schemeClr val="accent1"/>
-          </a:fillRef>
-          <a:effectRef idx="0">
-            <a:schemeClr val="accent1"/>
-          </a:effectRef>
-          <a:fontRef idx="minor">
-            <a:schemeClr val="lt1"/>
-          </a:fontRef>
-        </p:style>
-        <p:txBody>
-          <a:bodyPr rtlCol="0" anchor="ctr"/>
-          <a:lstStyle/>
-          <a:p>
-            <a:pPr algn="ctr"/>
-            <a:endParaRPr lang="es-AR" sz="2400" i="1" dirty="0">
-              <a:solidFill>
-                <a:schemeClr val="tx1"/>
-              </a:solidFill>
-              <a:latin typeface="Book Antiqua" pitchFamily="18" charset="0"/>
-            </a:endParaRPr>
-          </a:p>
-        </p:txBody>
-      </p:sp>
       <p:cxnSp>
         <p:nvCxnSpPr>
           <p:cNvPr id="16" name="25 Conector recto de flecha">
@@ -10173,8 +10070,8 @@
         </p:nvSpPr>
         <p:spPr>
           <a:xfrm>
-            <a:off x="1724000" y="-10254"/>
-            <a:ext cx="7620000" cy="1143000"/>
+            <a:off x="1723999" y="-10254"/>
+            <a:ext cx="9450819" cy="1143000"/>
           </a:xfrm>
         </p:spPr>
         <p:txBody>
@@ -10211,7 +10108,7 @@
         </p:blipFill>
         <p:spPr>
           <a:xfrm>
-            <a:off x="1724000" y="1268761"/>
+            <a:off x="2425749" y="1416491"/>
             <a:ext cx="7620000" cy="5441509"/>
           </a:xfrm>
           <a:prstGeom prst="rect">
@@ -11688,12 +11585,7 @@
             <p:ph type="title"/>
           </p:nvPr>
         </p:nvSpPr>
-        <p:spPr>
-          <a:xfrm>
-            <a:off x="1097279" y="286603"/>
-            <a:ext cx="10058401" cy="1450757"/>
-          </a:xfrm>
-        </p:spPr>
+        <p:spPr/>
         <p:txBody>
           <a:bodyPr/>
           <a:lstStyle/>
@@ -11831,40 +11723,40 @@
   <a:themeElements>
     <a:clrScheme name="Retrospección">
       <a:dk1>
-        <a:srgbClr val="000000"/>
+        <a:sysClr val="windowText" lastClr="000000"/>
       </a:dk1>
       <a:lt1>
         <a:sysClr val="window" lastClr="FFFFFF"/>
       </a:lt1>
       <a:dk2>
-        <a:srgbClr val="637052"/>
+        <a:srgbClr val="344068"/>
       </a:dk2>
       <a:lt2>
-        <a:srgbClr val="CCDDEA"/>
+        <a:srgbClr val="D9E0E6"/>
       </a:lt2>
       <a:accent1>
-        <a:srgbClr val="E48312"/>
+        <a:srgbClr val="1CADE4"/>
       </a:accent1>
       <a:accent2>
-        <a:srgbClr val="BD582C"/>
+        <a:srgbClr val="2683C6"/>
       </a:accent2>
       <a:accent3>
-        <a:srgbClr val="865640"/>
+        <a:srgbClr val="28C4CC"/>
       </a:accent3>
       <a:accent4>
-        <a:srgbClr val="9B8357"/>
+        <a:srgbClr val="42BA97"/>
       </a:accent4>
       <a:accent5>
-        <a:srgbClr val="C2BC80"/>
+        <a:srgbClr val="3E8853"/>
       </a:accent5>
       <a:accent6>
-        <a:srgbClr val="94A088"/>
+        <a:srgbClr val="62A39F"/>
       </a:accent6>
       <a:hlink>
-        <a:srgbClr val="2998E3"/>
+        <a:srgbClr val="6EAC1C"/>
       </a:hlink>
       <a:folHlink>
-        <a:srgbClr val="8C8C8C"/>
+        <a:srgbClr val="B26B02"/>
       </a:folHlink>
     </a:clrScheme>
     <a:fontScheme name="Retrospección">
@@ -12103,7 +11995,7 @@
   <a:extraClrSchemeLst/>
   <a:extLst>
     <a:ext uri="{05A4C25C-085E-4340-85A3-A5531E510DB2}">
-      <thm15:themeFamily xmlns:thm15="http://schemas.microsoft.com/office/thememl/2012/main" name="Retrospect" id="{5F128B03-DCCA-4EEB-AB3B-CF2899314A46}" vid="{3F1AAB62-24C6-49D2-8E01-B56FAC9A3DCD}"/>
+      <thm15:themeFamily xmlns:thm15="http://schemas.microsoft.com/office/thememl/2012/main" name="Retrospect" id="{5F128B03-DCCA-4EEB-AB3B-CF2899314A46}" vid="{9CC26709-368C-4D72-9060-94E5B3FF3CD6}"/>
     </a:ext>
   </a:extLst>
 </a:theme>
@@ -12425,20 +12317,20 @@
 </file>
 
 <file path=customXml/item1.xml><?xml version="1.0" encoding="utf-8"?>
+<p:properties xmlns:p="http://schemas.microsoft.com/office/2006/metadata/properties" xmlns:xsi="http://www.w3.org/2001/XMLSchema-instance" xmlns:pc="http://schemas.microsoft.com/office/infopath/2007/PartnerControls">
+  <documentManagement>
+    <_activity xmlns="73ecfec2-fe59-4214-9cad-f553ff4d189b" xsi:nil="true"/>
+  </documentManagement>
+</p:properties>
+</file>
+
+<file path=customXml/item2.xml><?xml version="1.0" encoding="utf-8"?>
 <?mso-contentType ?>
 <FormTemplates xmlns="http://schemas.microsoft.com/sharepoint/v3/contenttype/forms">
   <Display>DocumentLibraryForm</Display>
   <Edit>DocumentLibraryForm</Edit>
   <New>DocumentLibraryForm</New>
 </FormTemplates>
-</file>
-
-<file path=customXml/item2.xml><?xml version="1.0" encoding="utf-8"?>
-<p:properties xmlns:p="http://schemas.microsoft.com/office/2006/metadata/properties" xmlns:xsi="http://www.w3.org/2001/XMLSchema-instance" xmlns:pc="http://schemas.microsoft.com/office/infopath/2007/PartnerControls">
-  <documentManagement>
-    <_activity xmlns="73ecfec2-fe59-4214-9cad-f553ff4d189b" xsi:nil="true"/>
-  </documentManagement>
-</p:properties>
 </file>
 
 <file path=customXml/item3.xml><?xml version="1.0" encoding="utf-8"?>
@@ -12592,14 +12484,6 @@
 </file>
 
 <file path=customXml/itemProps1.xml><?xml version="1.0" encoding="utf-8"?>
-<ds:datastoreItem xmlns:ds="http://schemas.openxmlformats.org/officeDocument/2006/customXml" ds:itemID="{75669B48-8959-4D7D-9AAA-BC16556B4A29}">
-  <ds:schemaRefs>
-    <ds:schemaRef ds:uri="http://schemas.microsoft.com/sharepoint/v3/contenttype/forms"/>
-  </ds:schemaRefs>
-</ds:datastoreItem>
-</file>
-
-<file path=customXml/itemProps2.xml><?xml version="1.0" encoding="utf-8"?>
 <ds:datastoreItem xmlns:ds="http://schemas.openxmlformats.org/officeDocument/2006/customXml" ds:itemID="{A0607A6D-E8B8-4AA3-9E0C-8E15E1BEA06E}">
   <ds:schemaRefs>
     <ds:schemaRef ds:uri="http://purl.org/dc/terms/"/>
@@ -12611,6 +12495,14 @@
     <ds:schemaRef ds:uri="http://schemas.microsoft.com/office/infopath/2007/PartnerControls"/>
     <ds:schemaRef ds:uri="73ecfec2-fe59-4214-9cad-f553ff4d189b"/>
     <ds:schemaRef ds:uri="http://purl.org/dc/dcmitype/"/>
+  </ds:schemaRefs>
+</ds:datastoreItem>
+</file>
+
+<file path=customXml/itemProps2.xml><?xml version="1.0" encoding="utf-8"?>
+<ds:datastoreItem xmlns:ds="http://schemas.openxmlformats.org/officeDocument/2006/customXml" ds:itemID="{75669B48-8959-4D7D-9AAA-BC16556B4A29}">
+  <ds:schemaRefs>
+    <ds:schemaRef ds:uri="http://schemas.microsoft.com/sharepoint/v3/contenttype/forms"/>
   </ds:schemaRefs>
 </ds:datastoreItem>
 </file>
